--- a/Prezentacja produktu.pptx
+++ b/Prezentacja produktu.pptx
@@ -11117,66 +11117,14 @@
       </p:sp>
       <p:sp>
         <p:nvSpPr>
-          <p:cNvPr id="16" name="Shape 13"/>
-          <p:cNvSpPr/>
-          <p:nvPr/>
-        </p:nvSpPr>
-        <p:spPr>
-          <a:xfrm>
-            <a:off x="5746090" y="1682496"/>
-            <a:ext cx="705002" cy="705002"/>
-          </a:xfrm>
-          <a:prstGeom prst="roundRect">
-            <a:avLst>
-              <a:gd name="adj" fmla="val 24538"/>
-            </a:avLst>
-          </a:prstGeom>
-          <a:solidFill>
-            <a:srgbClr val="78350F"/>
-          </a:solidFill>
-          <a:ln w="12700">
-            <a:solidFill>
-              <a:srgbClr val="FFFFFF">
-                <a:alpha val="0"/>
-              </a:srgbClr>
-            </a:solidFill>
-            <a:prstDash val="solid"/>
-          </a:ln>
-        </p:spPr>
-      </p:sp>
-      <p:pic>
-        <p:nvPicPr>
-          <p:cNvPr id="17" name="Image 1" descr="preencoded.png"/>
-          <p:cNvPicPr>
-            <a:picLocks noChangeAspect="1"/>
-          </p:cNvPicPr>
-          <p:nvPr/>
-        </p:nvPicPr>
-        <p:blipFill>
-          <a:blip r:embed="rId4"/>
-          <a:srcRect l="-1052" r="-1052"/>
-          <a:stretch/>
-        </p:blipFill>
-        <p:spPr>
-          <a:xfrm>
-            <a:off x="5880506" y="1842516"/>
-            <a:ext cx="437998" cy="381305"/>
-          </a:xfrm>
-          <a:prstGeom prst="rect">
-            <a:avLst/>
-          </a:prstGeom>
-        </p:spPr>
-      </p:pic>
-      <p:sp>
-        <p:nvSpPr>
           <p:cNvPr id="18" name="Text 14"/>
           <p:cNvSpPr txBox="1"/>
           <p:nvPr/>
         </p:nvSpPr>
         <p:spPr>
           <a:xfrm>
-            <a:off x="5274259" y="2563063"/>
-            <a:ext cx="1650492" cy="333756"/>
+            <a:off x="5039259" y="2563063"/>
+            <a:ext cx="2028140" cy="333756"/>
           </a:xfrm>
           <a:prstGeom prst="rect">
             <a:avLst/>
@@ -11188,9 +11136,7 @@
           <a:bodyPr wrap="square" lIns="0" tIns="0" rIns="0" bIns="0" rtlCol="0" anchor="ctr"/>
           <a:lstStyle/>
           <a:p>
-            <a:pPr marL="0" indent="0" algn="ctr">
-              <a:buNone/>
-            </a:pPr>
+            <a:pPr algn="ctr"/>
             <a:r>
               <a:rPr lang="en-US" sz="1600" b="1" kern="0" spc="22" dirty="0">
                 <a:solidFill>
@@ -11200,7 +11146,29 @@
                 <a:ea typeface="Montserrat" pitchFamily="34" charset="-122"/>
                 <a:cs typeface="Montserrat" pitchFamily="34" charset="-120"/>
               </a:rPr>
-              <a:t>Pakiet Pełny</a:t>
+              <a:t>Project</a:t>
+            </a:r>
+            <a:r>
+              <a:rPr lang="pl-PL" sz="1600" b="1" kern="0" spc="22" dirty="0">
+                <a:solidFill>
+                  <a:srgbClr val="FFFFFF"/>
+                </a:solidFill>
+                <a:latin typeface="Montserrat" pitchFamily="34" charset="0"/>
+                <a:ea typeface="Montserrat" pitchFamily="34" charset="-122"/>
+                <a:cs typeface="Montserrat" pitchFamily="34" charset="-120"/>
+              </a:rPr>
+              <a:t> </a:t>
+            </a:r>
+            <a:r>
+              <a:rPr lang="en-US" sz="1600" b="1" kern="0" spc="22" dirty="0" err="1">
+                <a:solidFill>
+                  <a:srgbClr val="FFFFFF"/>
+                </a:solidFill>
+                <a:latin typeface="Montserrat" pitchFamily="34" charset="0"/>
+                <a:ea typeface="Montserrat" pitchFamily="34" charset="-122"/>
+                <a:cs typeface="Montserrat" pitchFamily="34" charset="-120"/>
+              </a:rPr>
+              <a:t>AntyScam</a:t>
             </a:r>
             <a:endParaRPr lang="en-US" sz="1600" dirty="0"/>
           </a:p>
@@ -11227,9 +11195,7 @@
           <a:bodyPr wrap="square" lIns="0" tIns="0" rIns="0" bIns="0" rtlCol="0" anchor="ctr"/>
           <a:lstStyle/>
           <a:p>
-            <a:pPr marL="0" indent="0" algn="ctr">
-              <a:buNone/>
-            </a:pPr>
+            <a:pPr algn="ctr"/>
             <a:r>
               <a:rPr lang="en-US" sz="1000" dirty="0">
                 <a:solidFill>
@@ -11239,7 +11205,18 @@
                 <a:ea typeface="Inter" pitchFamily="34" charset="-122"/>
                 <a:cs typeface="Inter" pitchFamily="34" charset="-120"/>
               </a:rPr>
-              <a:t>TZ + PA • Pełna kontrola decyzji</a:t>
+              <a:t>Long-term </a:t>
+            </a:r>
+            <a:r>
+              <a:rPr lang="en-US" sz="1000" dirty="0" err="1">
+                <a:solidFill>
+                  <a:srgbClr val="94A3B8"/>
+                </a:solidFill>
+                <a:latin typeface="Inter" pitchFamily="34" charset="0"/>
+                <a:ea typeface="Inter" pitchFamily="34" charset="-122"/>
+                <a:cs typeface="Inter" pitchFamily="34" charset="-120"/>
+              </a:rPr>
+              <a:t>inwestowanie</a:t>
             </a:r>
             <a:endParaRPr lang="en-US" sz="1000" dirty="0"/>
           </a:p>
@@ -11278,7 +11255,7 @@
                 <a:ea typeface="Montserrat" pitchFamily="34" charset="-122"/>
                 <a:cs typeface="Montserrat" pitchFamily="34" charset="-120"/>
               </a:rPr>
-              <a:t>349</a:t>
+              <a:t>199</a:t>
             </a:r>
             <a:r>
               <a:rPr lang="en-US" sz="3900" b="1" dirty="0">
@@ -11331,79 +11308,6 @@
               <a:t>/ miesiąc</a:t>
             </a:r>
             <a:endParaRPr lang="en-US" sz="1100" dirty="0"/>
-          </a:p>
-        </p:txBody>
-      </p:sp>
-      <p:pic>
-        <p:nvPicPr>
-          <p:cNvPr id="23" name="Image 2" descr="preencoded.png"/>
-          <p:cNvPicPr>
-            <a:picLocks noChangeAspect="1"/>
-          </p:cNvPicPr>
-          <p:nvPr/>
-        </p:nvPicPr>
-        <p:blipFill>
-          <a:blip r:embed="rId5"/>
-          <a:stretch>
-            <a:fillRect/>
-          </a:stretch>
-        </p:blipFill>
-        <p:spPr>
-          <a:xfrm>
-            <a:off x="6676034" y="1562710"/>
-            <a:ext cx="1126542" cy="203937"/>
-          </a:xfrm>
-          <a:prstGeom prst="rect">
-            <a:avLst/>
-          </a:prstGeom>
-        </p:spPr>
-      </p:pic>
-      <p:sp>
-        <p:nvSpPr>
-          <p:cNvPr id="24" name="Text 19"/>
-          <p:cNvSpPr/>
-          <p:nvPr/>
-        </p:nvSpPr>
-        <p:spPr>
-          <a:xfrm>
-            <a:off x="6676034" y="1562710"/>
-            <a:ext cx="1127455" cy="181965"/>
-          </a:xfrm>
-          <a:prstGeom prst="rect">
-            <a:avLst/>
-          </a:prstGeom>
-          <a:solidFill>
-            <a:srgbClr val="FFFFFF">
-              <a:alpha val="0"/>
-            </a:srgbClr>
-          </a:solidFill>
-          <a:ln>
-            <a:solidFill>
-              <a:srgbClr val="FFFFFF">
-                <a:alpha val="0"/>
-              </a:srgbClr>
-            </a:solidFill>
-          </a:ln>
-        </p:spPr>
-        <p:txBody>
-          <a:bodyPr wrap="square" lIns="0" tIns="0" rIns="0" bIns="0" rtlCol="0" anchor="ctr"/>
-          <a:lstStyle/>
-          <a:p>
-            <a:pPr marL="0" indent="0" algn="ctr">
-              <a:buNone/>
-            </a:pPr>
-            <a:r>
-              <a:rPr lang="en-US" sz="800" b="1" kern="0" spc="38" dirty="0">
-                <a:solidFill>
-                  <a:srgbClr val="FFFFFF"/>
-                </a:solidFill>
-                <a:latin typeface="Inter" pitchFamily="34" charset="0"/>
-                <a:ea typeface="Inter" pitchFamily="34" charset="-122"/>
-                <a:cs typeface="Inter" pitchFamily="34" charset="-120"/>
-              </a:rPr>
-              <a:t>NAJLEPSZA WARTOŚĆ</a:t>
-            </a:r>
-            <a:endParaRPr lang="en-US" sz="800" dirty="0"/>
           </a:p>
         </p:txBody>
       </p:sp>
@@ -11461,58 +11365,79 @@
           </a:ln>
         </p:spPr>
       </p:sp>
-      <p:sp>
-        <p:nvSpPr>
-          <p:cNvPr id="27" name="Shape 22"/>
-          <p:cNvSpPr/>
-          <p:nvPr/>
-        </p:nvSpPr>
-        <p:spPr>
-          <a:xfrm>
-            <a:off x="9588398" y="1744675"/>
+      <p:grpSp>
+        <p:nvGrpSpPr>
+          <p:cNvPr id="20" name="Grupa 19">
+            <a:extLst>
+              <a:ext uri="{FF2B5EF4-FFF2-40B4-BE49-F238E27FC236}">
+                <a16:creationId xmlns:a16="http://schemas.microsoft.com/office/drawing/2014/main" id="{8BBBA8E6-47BF-4A47-EA8C-DC10F1B67508}"/>
+              </a:ext>
+            </a:extLst>
+          </p:cNvPr>
+          <p:cNvGrpSpPr/>
+          <p:nvPr/>
+        </p:nvGrpSpPr>
+        <p:grpSpPr>
+          <a:xfrm>
+            <a:off x="5653278" y="1716481"/>
             <a:ext cx="666598" cy="666598"/>
-          </a:xfrm>
-          <a:prstGeom prst="roundRect">
-            <a:avLst>
-              <a:gd name="adj" fmla="val 27435"/>
-            </a:avLst>
-          </a:prstGeom>
-          <a:solidFill>
-            <a:srgbClr val="1E3A8A"/>
-          </a:solidFill>
-          <a:ln w="12700">
+            <a:chOff x="9588398" y="1744675"/>
+            <a:chExt cx="666598" cy="666598"/>
+          </a:xfrm>
+        </p:grpSpPr>
+        <p:sp>
+          <p:nvSpPr>
+            <p:cNvPr id="27" name="Shape 22"/>
+            <p:cNvSpPr/>
+            <p:nvPr/>
+          </p:nvSpPr>
+          <p:spPr>
+            <a:xfrm>
+              <a:off x="9588398" y="1744675"/>
+              <a:ext cx="666598" cy="666598"/>
+            </a:xfrm>
+            <a:prstGeom prst="roundRect">
+              <a:avLst>
+                <a:gd name="adj" fmla="val 27435"/>
+              </a:avLst>
+            </a:prstGeom>
             <a:solidFill>
-              <a:srgbClr val="FFFFFF">
-                <a:alpha val="0"/>
-              </a:srgbClr>
+              <a:srgbClr val="1E3A8A"/>
             </a:solidFill>
-            <a:prstDash val="solid"/>
-          </a:ln>
-        </p:spPr>
-      </p:sp>
-      <p:pic>
-        <p:nvPicPr>
-          <p:cNvPr id="28" name="Image 3" descr="preencoded.png"/>
-          <p:cNvPicPr>
-            <a:picLocks noChangeAspect="1"/>
-          </p:cNvPicPr>
-          <p:nvPr/>
-        </p:nvPicPr>
-        <p:blipFill>
-          <a:blip r:embed="rId6"/>
-          <a:srcRect/>
-          <a:stretch/>
-        </p:blipFill>
-        <p:spPr>
-          <a:xfrm>
-            <a:off x="9750247" y="1906524"/>
-            <a:ext cx="342900" cy="342900"/>
-          </a:xfrm>
-          <a:prstGeom prst="rect">
-            <a:avLst/>
-          </a:prstGeom>
-        </p:spPr>
-      </p:pic>
+            <a:ln w="12700">
+              <a:solidFill>
+                <a:srgbClr val="FFFFFF">
+                  <a:alpha val="0"/>
+                </a:srgbClr>
+              </a:solidFill>
+              <a:prstDash val="solid"/>
+            </a:ln>
+          </p:spPr>
+        </p:sp>
+        <p:pic>
+          <p:nvPicPr>
+            <p:cNvPr id="28" name="Image 3" descr="preencoded.png"/>
+            <p:cNvPicPr>
+              <a:picLocks noChangeAspect="1"/>
+            </p:cNvPicPr>
+            <p:nvPr/>
+          </p:nvPicPr>
+          <p:blipFill>
+            <a:blip r:embed="rId4"/>
+            <a:srcRect/>
+            <a:stretch/>
+          </p:blipFill>
+          <p:spPr>
+            <a:xfrm>
+              <a:off x="9750247" y="1906524"/>
+              <a:ext cx="342900" cy="342900"/>
+            </a:xfrm>
+            <a:prstGeom prst="rect">
+              <a:avLst/>
+            </a:prstGeom>
+          </p:spPr>
+        </p:pic>
+      </p:grpSp>
       <p:sp>
         <p:nvSpPr>
           <p:cNvPr id="29" name="Text 23"/>
@@ -11521,7 +11446,7 @@
         </p:nvSpPr>
         <p:spPr>
           <a:xfrm>
-            <a:off x="8888882" y="2583180"/>
+            <a:off x="8907725" y="2701594"/>
             <a:ext cx="2067458" cy="314554"/>
           </a:xfrm>
           <a:prstGeom prst="rect">
@@ -11534,147 +11459,215 @@
           <a:bodyPr wrap="square" lIns="0" tIns="0" rIns="0" bIns="0" rtlCol="0" anchor="ctr"/>
           <a:lstStyle/>
           <a:p>
+            <a:pPr algn="ctr"/>
+            <a:r>
+              <a:rPr lang="pl-PL" sz="1600" b="1" kern="0" spc="22" dirty="0">
+                <a:solidFill>
+                  <a:srgbClr val="FFFFFF"/>
+                </a:solidFill>
+                <a:latin typeface="Montserrat" pitchFamily="34" charset="0"/>
+                <a:ea typeface="Montserrat" pitchFamily="34" charset="-122"/>
+                <a:cs typeface="Montserrat" pitchFamily="34" charset="-120"/>
+              </a:rPr>
+              <a:t>P</a:t>
+            </a:r>
+            <a:r>
+              <a:rPr lang="en-US" sz="1600" b="1" kern="0" spc="22" dirty="0" err="1">
+                <a:solidFill>
+                  <a:srgbClr val="FFFFFF"/>
+                </a:solidFill>
+                <a:latin typeface="Montserrat" pitchFamily="34" charset="0"/>
+                <a:ea typeface="Montserrat" pitchFamily="34" charset="-122"/>
+                <a:cs typeface="Montserrat" pitchFamily="34" charset="-120"/>
+              </a:rPr>
+              <a:t>akiet</a:t>
+            </a:r>
+            <a:r>
+              <a:rPr lang="en-US" sz="1600" b="1" kern="0" spc="22" dirty="0">
+                <a:solidFill>
+                  <a:srgbClr val="FFFFFF"/>
+                </a:solidFill>
+                <a:latin typeface="Montserrat" pitchFamily="34" charset="0"/>
+                <a:ea typeface="Montserrat" pitchFamily="34" charset="-122"/>
+                <a:cs typeface="Montserrat" pitchFamily="34" charset="-120"/>
+              </a:rPr>
+              <a:t> </a:t>
+            </a:r>
+            <a:r>
+              <a:rPr lang="en-US" sz="1600" b="1" kern="0" spc="22" dirty="0" err="1">
+                <a:solidFill>
+                  <a:srgbClr val="FFFFFF"/>
+                </a:solidFill>
+                <a:latin typeface="Montserrat" pitchFamily="34" charset="0"/>
+                <a:ea typeface="Montserrat" pitchFamily="34" charset="-122"/>
+                <a:cs typeface="Montserrat" pitchFamily="34" charset="-120"/>
+              </a:rPr>
+              <a:t>Pełny</a:t>
+            </a:r>
+            <a:endParaRPr lang="en-US" sz="1600" dirty="0"/>
+          </a:p>
+          <a:p>
             <a:pPr marL="0" indent="0" algn="ctr">
               <a:buNone/>
             </a:pPr>
-            <a:r>
-              <a:rPr lang="en-US" sz="1600" b="1" kern="0" spc="22" dirty="0">
-                <a:solidFill>
-                  <a:srgbClr val="FFFFFF"/>
+            <a:endParaRPr lang="en-US" sz="1600" dirty="0"/>
+          </a:p>
+        </p:txBody>
+      </p:sp>
+      <p:sp>
+        <p:nvSpPr>
+          <p:cNvPr id="30" name="Text 24"/>
+          <p:cNvSpPr txBox="1"/>
+          <p:nvPr/>
+        </p:nvSpPr>
+        <p:spPr>
+          <a:xfrm>
+            <a:off x="9013241" y="2992831"/>
+            <a:ext cx="1824228" cy="191110"/>
+          </a:xfrm>
+          <a:prstGeom prst="rect">
+            <a:avLst/>
+          </a:prstGeom>
+          <a:noFill/>
+          <a:ln/>
+        </p:spPr>
+        <p:txBody>
+          <a:bodyPr wrap="square" lIns="0" tIns="0" rIns="0" bIns="0" rtlCol="0" anchor="ctr"/>
+          <a:lstStyle/>
+          <a:p>
+            <a:pPr algn="ctr"/>
+            <a:endParaRPr lang="pl-PL" sz="1000" dirty="0">
+              <a:solidFill>
+                <a:srgbClr val="94A3B8"/>
+              </a:solidFill>
+              <a:latin typeface="Inter" pitchFamily="34" charset="0"/>
+              <a:ea typeface="Inter" pitchFamily="34" charset="-122"/>
+              <a:cs typeface="Inter" pitchFamily="34" charset="-120"/>
+            </a:endParaRPr>
+          </a:p>
+          <a:p>
+            <a:pPr algn="ctr"/>
+            <a:r>
+              <a:rPr lang="en-US" sz="1000" dirty="0">
+                <a:solidFill>
+                  <a:srgbClr val="94A3B8"/>
+                </a:solidFill>
+                <a:latin typeface="Inter" pitchFamily="34" charset="0"/>
+                <a:ea typeface="Inter" pitchFamily="34" charset="-122"/>
+                <a:cs typeface="Inter" pitchFamily="34" charset="-120"/>
+              </a:rPr>
+              <a:t>TZ + PA • </a:t>
+            </a:r>
+            <a:r>
+              <a:rPr lang="en-US" sz="1000" dirty="0" err="1">
+                <a:solidFill>
+                  <a:srgbClr val="94A3B8"/>
+                </a:solidFill>
+                <a:latin typeface="Inter" pitchFamily="34" charset="0"/>
+                <a:ea typeface="Inter" pitchFamily="34" charset="-122"/>
+                <a:cs typeface="Inter" pitchFamily="34" charset="-120"/>
+              </a:rPr>
+              <a:t>Pełna</a:t>
+            </a:r>
+            <a:r>
+              <a:rPr lang="en-US" sz="1000" dirty="0">
+                <a:solidFill>
+                  <a:srgbClr val="94A3B8"/>
+                </a:solidFill>
+                <a:latin typeface="Inter" pitchFamily="34" charset="0"/>
+                <a:ea typeface="Inter" pitchFamily="34" charset="-122"/>
+                <a:cs typeface="Inter" pitchFamily="34" charset="-120"/>
+              </a:rPr>
+              <a:t> </a:t>
+            </a:r>
+            <a:r>
+              <a:rPr lang="en-US" sz="1000" dirty="0" err="1">
+                <a:solidFill>
+                  <a:srgbClr val="94A3B8"/>
+                </a:solidFill>
+                <a:latin typeface="Inter" pitchFamily="34" charset="0"/>
+                <a:ea typeface="Inter" pitchFamily="34" charset="-122"/>
+                <a:cs typeface="Inter" pitchFamily="34" charset="-120"/>
+              </a:rPr>
+              <a:t>kontrola</a:t>
+            </a:r>
+            <a:r>
+              <a:rPr lang="en-US" sz="1000" dirty="0">
+                <a:solidFill>
+                  <a:srgbClr val="94A3B8"/>
+                </a:solidFill>
+                <a:latin typeface="Inter" pitchFamily="34" charset="0"/>
+                <a:ea typeface="Inter" pitchFamily="34" charset="-122"/>
+                <a:cs typeface="Inter" pitchFamily="34" charset="-120"/>
+              </a:rPr>
+              <a:t> </a:t>
+            </a:r>
+            <a:r>
+              <a:rPr lang="en-US" sz="1000" dirty="0" err="1">
+                <a:solidFill>
+                  <a:srgbClr val="94A3B8"/>
+                </a:solidFill>
+                <a:latin typeface="Inter" pitchFamily="34" charset="0"/>
+                <a:ea typeface="Inter" pitchFamily="34" charset="-122"/>
+                <a:cs typeface="Inter" pitchFamily="34" charset="-120"/>
+              </a:rPr>
+              <a:t>decyzji</a:t>
+            </a:r>
+            <a:endParaRPr lang="en-US" sz="1000" dirty="0"/>
+          </a:p>
+          <a:p>
+            <a:pPr marL="0" indent="0" algn="ctr">
+              <a:buNone/>
+            </a:pPr>
+            <a:r>
+              <a:rPr lang="pl-PL" sz="1000" dirty="0">
+                <a:solidFill>
+                  <a:srgbClr val="94A3B8"/>
+                </a:solidFill>
+                <a:latin typeface="Inter" pitchFamily="34" charset="0"/>
+                <a:ea typeface="Inter" pitchFamily="34" charset="-122"/>
+                <a:cs typeface="Inter" pitchFamily="34" charset="-120"/>
+              </a:rPr>
+              <a:t> </a:t>
+            </a:r>
+            <a:endParaRPr lang="en-US" sz="1000" dirty="0"/>
+          </a:p>
+        </p:txBody>
+      </p:sp>
+      <p:sp>
+        <p:nvSpPr>
+          <p:cNvPr id="32" name="Text 26"/>
+          <p:cNvSpPr txBox="1"/>
+          <p:nvPr/>
+        </p:nvSpPr>
+        <p:spPr>
+          <a:xfrm>
+            <a:off x="9264701" y="3712464"/>
+            <a:ext cx="1948586" cy="495605"/>
+          </a:xfrm>
+          <a:prstGeom prst="rect">
+            <a:avLst/>
+          </a:prstGeom>
+          <a:noFill/>
+          <a:ln/>
+        </p:spPr>
+        <p:txBody>
+          <a:bodyPr wrap="square" lIns="0" tIns="0" rIns="0" bIns="0" rtlCol="0" anchor="ctr"/>
+          <a:lstStyle/>
+          <a:p>
+            <a:pPr marL="0" indent="0" algn="l">
+              <a:buNone/>
+            </a:pPr>
+            <a:r>
+              <a:rPr lang="pl-PL" sz="3900" b="1" dirty="0">
+                <a:solidFill>
+                  <a:srgbClr val="10B981"/>
                 </a:solidFill>
                 <a:latin typeface="Montserrat" pitchFamily="34" charset="0"/>
                 <a:ea typeface="Montserrat" pitchFamily="34" charset="-122"/>
                 <a:cs typeface="Montserrat" pitchFamily="34" charset="-120"/>
               </a:rPr>
-              <a:t>ProjectAntyScam</a:t>
-            </a:r>
-            <a:endParaRPr lang="en-US" sz="1600" dirty="0"/>
-          </a:p>
-        </p:txBody>
-      </p:sp>
-      <p:sp>
-        <p:nvSpPr>
-          <p:cNvPr id="30" name="Text 24"/>
-          <p:cNvSpPr txBox="1"/>
-          <p:nvPr/>
-        </p:nvSpPr>
-        <p:spPr>
-          <a:xfrm>
-            <a:off x="9013241" y="2992831"/>
-            <a:ext cx="1824228" cy="191110"/>
-          </a:xfrm>
-          <a:prstGeom prst="rect">
-            <a:avLst/>
-          </a:prstGeom>
-          <a:noFill/>
-          <a:ln/>
-        </p:spPr>
-        <p:txBody>
-          <a:bodyPr wrap="square" lIns="0" tIns="0" rIns="0" bIns="0" rtlCol="0" anchor="ctr"/>
-          <a:lstStyle/>
-          <a:p>
-            <a:pPr marL="0" indent="0" algn="ctr">
-              <a:buNone/>
-            </a:pPr>
-            <a:r>
-              <a:rPr lang="en-US" sz="1000" dirty="0">
-                <a:solidFill>
-                  <a:srgbClr val="94A3B8"/>
-                </a:solidFill>
-                <a:latin typeface="Inter" pitchFamily="34" charset="0"/>
-                <a:ea typeface="Inter" pitchFamily="34" charset="-122"/>
-                <a:cs typeface="Inter" pitchFamily="34" charset="-120"/>
-              </a:rPr>
-              <a:t>Long-term inwestowanie</a:t>
-            </a:r>
-            <a:endParaRPr lang="en-US" sz="1000" dirty="0"/>
-          </a:p>
-        </p:txBody>
-      </p:sp>
-      <p:sp>
-        <p:nvSpPr>
-          <p:cNvPr id="31" name="Text 25"/>
-          <p:cNvSpPr txBox="1"/>
-          <p:nvPr/>
-        </p:nvSpPr>
-        <p:spPr>
-          <a:xfrm>
-            <a:off x="9659722" y="3369564"/>
-            <a:ext cx="635508" cy="286207"/>
-          </a:xfrm>
-          <a:prstGeom prst="rect">
-            <a:avLst/>
-          </a:prstGeom>
-          <a:noFill/>
-          <a:ln/>
-        </p:spPr>
-        <p:txBody>
-          <a:bodyPr wrap="square" lIns="0" tIns="0" rIns="0" bIns="0" rtlCol="0" anchor="ctr"/>
-          <a:lstStyle/>
-          <a:p>
-            <a:pPr marL="0" indent="0" algn="l">
-              <a:buNone/>
-            </a:pPr>
-            <a:r>
-              <a:rPr lang="en-US" sz="1500" b="1" dirty="0">
-                <a:solidFill>
-                  <a:srgbClr val="64748B"/>
-                </a:solidFill>
-                <a:latin typeface="Montserrat" pitchFamily="34" charset="0"/>
-                <a:ea typeface="Montserrat" pitchFamily="34" charset="-122"/>
-                <a:cs typeface="Montserrat" pitchFamily="34" charset="-120"/>
-              </a:rPr>
-              <a:t>199 zł</a:t>
-            </a:r>
-            <a:endParaRPr lang="en-US" sz="1500" dirty="0"/>
-          </a:p>
-        </p:txBody>
-      </p:sp>
-      <p:sp>
-        <p:nvSpPr>
-          <p:cNvPr id="32" name="Text 26"/>
-          <p:cNvSpPr txBox="1"/>
-          <p:nvPr/>
-        </p:nvSpPr>
-        <p:spPr>
-          <a:xfrm>
-            <a:off x="9264701" y="3712464"/>
-            <a:ext cx="1948586" cy="495605"/>
-          </a:xfrm>
-          <a:prstGeom prst="rect">
-            <a:avLst/>
-          </a:prstGeom>
-          <a:noFill/>
-          <a:ln/>
-        </p:spPr>
-        <p:txBody>
-          <a:bodyPr wrap="square" lIns="0" tIns="0" rIns="0" bIns="0" rtlCol="0" anchor="ctr"/>
-          <a:lstStyle/>
-          <a:p>
-            <a:pPr marL="0" indent="0" algn="l">
-              <a:buNone/>
-            </a:pPr>
-            <a:r>
-              <a:rPr lang="en-US" sz="3900" b="1" dirty="0">
-                <a:solidFill>
-                  <a:srgbClr val="10B981"/>
-                </a:solidFill>
-                <a:latin typeface="Montserrat" pitchFamily="34" charset="0"/>
-                <a:ea typeface="Montserrat" pitchFamily="34" charset="-122"/>
-                <a:cs typeface="Montserrat" pitchFamily="34" charset="-120"/>
-              </a:rPr>
-              <a:t>1</a:t>
-            </a:r>
-            <a:r>
-              <a:rPr lang="pl-PL" sz="3900" b="1" dirty="0">
-                <a:solidFill>
-                  <a:srgbClr val="10B981"/>
-                </a:solidFill>
-                <a:latin typeface="Montserrat" pitchFamily="34" charset="0"/>
-                <a:ea typeface="Montserrat" pitchFamily="34" charset="-122"/>
-                <a:cs typeface="Montserrat" pitchFamily="34" charset="-120"/>
-              </a:rPr>
-              <a:t>9</a:t>
+              <a:t>31</a:t>
             </a:r>
             <a:r>
               <a:rPr lang="en-US" sz="3900" b="1" dirty="0">
@@ -11973,6 +11966,79 @@
           </a:p>
         </p:txBody>
       </p:sp>
+      <p:grpSp>
+        <p:nvGrpSpPr>
+          <p:cNvPr id="40" name="Grupa 39">
+            <a:extLst>
+              <a:ext uri="{FF2B5EF4-FFF2-40B4-BE49-F238E27FC236}">
+                <a16:creationId xmlns:a16="http://schemas.microsoft.com/office/drawing/2014/main" id="{87C85AB7-4F2B-6D69-540D-4DFD74FFB1DF}"/>
+              </a:ext>
+            </a:extLst>
+          </p:cNvPr>
+          <p:cNvGrpSpPr/>
+          <p:nvPr/>
+        </p:nvGrpSpPr>
+        <p:grpSpPr>
+          <a:xfrm>
+            <a:off x="9550451" y="1706271"/>
+            <a:ext cx="705002" cy="705002"/>
+            <a:chOff x="5768950" y="1677924"/>
+            <a:chExt cx="705002" cy="705002"/>
+          </a:xfrm>
+        </p:grpSpPr>
+        <p:sp>
+          <p:nvSpPr>
+            <p:cNvPr id="16" name="Shape 13"/>
+            <p:cNvSpPr/>
+            <p:nvPr/>
+          </p:nvSpPr>
+          <p:spPr>
+            <a:xfrm>
+              <a:off x="5768950" y="1677924"/>
+              <a:ext cx="705002" cy="705002"/>
+            </a:xfrm>
+            <a:prstGeom prst="roundRect">
+              <a:avLst>
+                <a:gd name="adj" fmla="val 24538"/>
+              </a:avLst>
+            </a:prstGeom>
+            <a:solidFill>
+              <a:srgbClr val="78350F"/>
+            </a:solidFill>
+            <a:ln w="12700">
+              <a:solidFill>
+                <a:srgbClr val="FFFFFF">
+                  <a:alpha val="0"/>
+                </a:srgbClr>
+              </a:solidFill>
+              <a:prstDash val="solid"/>
+            </a:ln>
+          </p:spPr>
+        </p:sp>
+        <p:pic>
+          <p:nvPicPr>
+            <p:cNvPr id="17" name="Image 1" descr="preencoded.png"/>
+            <p:cNvPicPr>
+              <a:picLocks noChangeAspect="1"/>
+            </p:cNvPicPr>
+            <p:nvPr/>
+          </p:nvPicPr>
+          <p:blipFill>
+            <a:blip r:embed="rId5"/>
+            <a:srcRect l="-1052" r="-1052"/>
+            <a:stretch/>
+          </p:blipFill>
+          <p:spPr>
+            <a:xfrm>
+              <a:off x="5880506" y="1842516"/>
+              <a:ext cx="437998" cy="381305"/>
+            </a:xfrm>
+            <a:prstGeom prst="rect">
+              <a:avLst/>
+            </a:prstGeom>
+          </p:spPr>
+        </p:pic>
+      </p:grpSp>
     </p:spTree>
   </p:cSld>
   <p:clrMapOvr>
